--- a/docs/meetings/TSAT_ESM_Program_Overview_2026-10_TH.pptx
+++ b/docs/meetings/TSAT_ESM_Program_Overview_2026-10_TH.pptx
@@ -28,6 +28,7 @@
     <p:sldId id="276" r:id="rId28"/>
     <p:sldId id="277" r:id="rId29"/>
     <p:sldId id="278" r:id="rId30"/>
+    <p:sldId id="279" r:id="rId31"/>
   </p:sldIdLst>
   <p:sldSz cx="12191695" cy="6858000" type="screen4x3"/>
   <p:notesSz cx="6858000" cy="9144000"/>
@@ -1630,6 +1631,91 @@
 </file>
 
 <file path=ppt/notesSlides/notesSlide23.xml><?xml version="1.0" encoding="utf-8"?>
+<p:notes xmlns:a="http://schemas.openxmlformats.org/drawingml/2006/main" xmlns:p="http://schemas.openxmlformats.org/presentationml/2006/main" xmlns:r="http://schemas.openxmlformats.org/officeDocument/2006/relationships">
+  <p:cSld>
+    <p:spTree>
+      <p:nvGrpSpPr>
+        <p:cNvPr id="1" name=""/>
+        <p:cNvGrpSpPr/>
+        <p:nvPr/>
+      </p:nvGrpSpPr>
+      <p:grpSpPr>
+        <a:xfrm>
+          <a:off x="0" y="0"/>
+          <a:ext cx="0" cy="0"/>
+          <a:chOff x="0" y="0"/>
+          <a:chExt cx="0" cy="0"/>
+        </a:xfrm>
+      </p:grpSpPr>
+      <p:sp>
+        <p:nvSpPr>
+          <p:cNvPr id="2" name="Slide Image Placeholder 1"/>
+          <p:cNvSpPr>
+            <a:spLocks noGrp="1"/>
+          </p:cNvSpPr>
+          <p:nvPr>
+            <p:ph type="sldImg" idx="2"/>
+          </p:nvPr>
+        </p:nvSpPr>
+        <p:spPr/>
+      </p:sp>
+      <p:sp>
+        <p:nvSpPr>
+          <p:cNvPr id="3" name="Notes Placeholder 2"/>
+          <p:cNvSpPr>
+            <a:spLocks noGrp="1"/>
+          </p:cNvSpPr>
+          <p:nvPr>
+            <p:ph type="body" idx="3" sz="quarter"/>
+          </p:nvPr>
+        </p:nvSpPr>
+        <p:spPr/>
+        <p:txBody>
+          <a:bodyPr/>
+          <a:lstStyle/>
+          <a:p>
+            <a:r>
+              <a:t>ภาพอนาคต (ยังเป็นแผน ไม่ใช่สิ่งที่ทำเสร็จแล้ว): ESM ที่ TSAT เป็นต้นแบบ โรงงานอื่นในกลุ่มใช้โปรแกรมเดียวกันได้</a:t>
+            </a:r>
+          </a:p>
+          <a:p>
+            <a:r>
+              <a:t>แต่ละโรงงานมีข้อมูลและผู้ใช้ของตัวเอง ไม่เห็นข้อมูลกัน — ปรับปรุงที่เดียว ได้ทุกโรง</a:t>
+            </a:r>
+          </a:p>
+          <a:p>
+            <a:r>
+              <a:t>สิ่งที่โรงงานใหม่ต้องเตรียม 3 อย่าง: ที่ตั้งระบบ (IT) · ชื่อ/โลโก้/ฟอร์มของตัวเอง (ทีม ESM) · ข้อมูลโรงงาน (นานที่สุด)</a:t>
+            </a:r>
+          </a:p>
+          <a:p>
+            <a:r>
+              <a:t>ข้อเสนอเบื้องต้น ~5 สัปดาห์ต่อโรงงาน ขึ้นกับความพร้อมข้อมูล · เช็คลิสต์เต็ม: ESM_New_Factory_Deploy_Checklist_2026-10-28.pptx</a:t>
+            </a:r>
+          </a:p>
+        </p:txBody>
+      </p:sp>
+      <p:sp>
+        <p:nvSpPr>
+          <p:cNvPr id="4" name="Slide Number Placeholder 3"/>
+          <p:cNvSpPr>
+            <a:spLocks noGrp="1"/>
+          </p:cNvSpPr>
+          <p:nvPr>
+            <p:ph type="sldNum" idx="5" sz="quarter"/>
+          </p:nvPr>
+        </p:nvSpPr>
+        <p:spPr/>
+      </p:sp>
+    </p:spTree>
+  </p:cSld>
+  <p:clrMapOvr>
+    <a:masterClrMapping/>
+  </p:clrMapOvr>
+</p:notes>
+</file>
+
+<file path=ppt/notesSlides/notesSlide24.xml><?xml version="1.0" encoding="utf-8"?>
 <p:notes xmlns:a="http://schemas.openxmlformats.org/drawingml/2006/main" xmlns:p="http://schemas.openxmlformats.org/presentationml/2006/main" xmlns:r="http://schemas.openxmlformats.org/officeDocument/2006/relationships">
   <p:cSld>
     <p:spTree>
@@ -27978,21 +28064,21 @@
         </p:nvSpPr>
         <p:spPr>
           <a:xfrm>
-            <a:off x="822960" y="2779776"/>
-            <a:ext cx="10552176" cy="649224"/>
-          </a:xfrm>
-          <a:prstGeom prst="rect">
-            <a:avLst/>
-          </a:prstGeom>
-          <a:noFill/>
-        </p:spPr>
-        <p:txBody>
-          <a:bodyPr wrap="square" anchor="ctr" lIns="27432" rIns="27432" tIns="9144" bIns="9144">
-            <a:spAutoFit/>
-          </a:bodyPr>
-          <a:lstStyle/>
-          <a:p>
-            <a:pPr algn="ctr">
+            <a:off x="256032" y="256032"/>
+            <a:ext cx="11430000" cy="649224"/>
+          </a:xfrm>
+          <a:prstGeom prst="rect">
+            <a:avLst/>
+          </a:prstGeom>
+          <a:noFill/>
+        </p:spPr>
+        <p:txBody>
+          <a:bodyPr wrap="square" anchor="t" lIns="27432" rIns="27432" tIns="9144" bIns="9144">
+            <a:spAutoFit/>
+          </a:bodyPr>
+          <a:lstStyle/>
+          <a:p>
+            <a:pPr algn="l">
               <a:spcBef>
                 <a:spcPts val="0"/>
               </a:spcBef>
@@ -28001,13 +28087,13 @@
               </a:spcAft>
             </a:pPr>
             <a:r>
-              <a:rPr sz="3500" b="1" i="0">
+              <a:rPr sz="3300" b="1" i="0">
                 <a:solidFill>
                   <a:srgbClr val="068734"/>
                 </a:solidFill>
                 <a:latin typeface="Tahoma"/>
               </a:rPr>
-              <a:t>Before We Build Parts, We Build People</a:t>
+              <a:t>ก้าวต่อไป: จาก TSAT สู่โรงงานอื่นในกลุ่ม</a:t>
             </a:r>
           </a:p>
         </p:txBody>
@@ -28020,21 +28106,21 @@
         </p:nvSpPr>
         <p:spPr>
           <a:xfrm>
-            <a:off x="822960" y="3611880"/>
-            <a:ext cx="10552176" cy="457200"/>
-          </a:xfrm>
-          <a:prstGeom prst="rect">
-            <a:avLst/>
-          </a:prstGeom>
-          <a:noFill/>
-        </p:spPr>
-        <p:txBody>
-          <a:bodyPr wrap="square" anchor="ctr" lIns="27432" rIns="27432" tIns="9144" bIns="9144">
-            <a:spAutoFit/>
-          </a:bodyPr>
-          <a:lstStyle/>
-          <a:p>
-            <a:pPr algn="ctr">
+            <a:off x="384048" y="960120"/>
+            <a:ext cx="11247120" cy="402336"/>
+          </a:xfrm>
+          <a:prstGeom prst="rect">
+            <a:avLst/>
+          </a:prstGeom>
+          <a:noFill/>
+        </p:spPr>
+        <p:txBody>
+          <a:bodyPr wrap="square" anchor="t" lIns="27432" rIns="27432" tIns="9144" bIns="9144">
+            <a:spAutoFit/>
+          </a:bodyPr>
+          <a:lstStyle/>
+          <a:p>
+            <a:pPr algn="l">
               <a:spcBef>
                 <a:spcPts val="0"/>
               </a:spcBef>
@@ -28043,62 +28129,20 @@
               </a:spcAft>
             </a:pPr>
             <a:r>
-              <a:rPr sz="2200" b="1" i="0">
-                <a:solidFill>
-                  <a:srgbClr val="D95323"/>
-                </a:solidFill>
-                <a:latin typeface="Tahoma"/>
-              </a:rPr>
-              <a:t>บันทึกครั้งเดียว ทุกคนเห็น ทันที</a:t>
-            </a:r>
-          </a:p>
-        </p:txBody>
-      </p:sp>
-      <p:sp>
-        <p:nvSpPr>
-          <p:cNvPr id="4" name="TextBox 3"/>
-          <p:cNvSpPr txBox="1"/>
-          <p:nvPr/>
-        </p:nvSpPr>
-        <p:spPr>
-          <a:xfrm>
-            <a:off x="822960" y="4160520"/>
-            <a:ext cx="10552176" cy="457200"/>
-          </a:xfrm>
-          <a:prstGeom prst="rect">
-            <a:avLst/>
-          </a:prstGeom>
-          <a:noFill/>
-        </p:spPr>
-        <p:txBody>
-          <a:bodyPr wrap="square" anchor="ctr" lIns="27432" rIns="27432" tIns="9144" bIns="9144">
-            <a:spAutoFit/>
-          </a:bodyPr>
-          <a:lstStyle/>
-          <a:p>
-            <a:pPr algn="ctr">
-              <a:spcBef>
-                <a:spcPts val="0"/>
-              </a:spcBef>
-              <a:spcAft>
-                <a:spcPts val="200"/>
-              </a:spcAft>
-            </a:pPr>
-            <a:r>
-              <a:rPr sz="2200" b="1" i="0">
+              <a:rPr sz="2000" b="1" i="0">
                 <a:solidFill>
                   <a:srgbClr val="068734"/>
                 </a:solidFill>
                 <a:latin typeface="Tahoma"/>
               </a:rPr>
-              <a:t>ขอบคุณ  ·  ถาม-ตอบ</a:t>
+              <a:t>โปรแกรมเดียวกัน · ข้อมูลของแต่ละโรงงานแยกกัน</a:t>
             </a:r>
           </a:p>
         </p:txBody>
       </p:sp>
       <p:pic>
         <p:nvPicPr>
-          <p:cNvPr id="5" name="Picture 4" descr="logo_r01.png"/>
+          <p:cNvPr id="4" name="Picture 3" descr="logo_r01.png"/>
           <p:cNvPicPr>
             <a:picLocks noChangeAspect="1"/>
           </p:cNvPicPr>
@@ -28122,7 +28166,7 @@
       </p:pic>
       <p:sp>
         <p:nvSpPr>
-          <p:cNvPr id="6" name="TextBox 5"/>
+          <p:cNvPr id="5" name="TextBox 4"/>
           <p:cNvSpPr txBox="1"/>
           <p:nvPr/>
         </p:nvSpPr>
@@ -28164,7 +28208,7 @@
       </p:sp>
       <p:sp>
         <p:nvSpPr>
-          <p:cNvPr id="7" name="TextBox 6"/>
+          <p:cNvPr id="6" name="TextBox 5"/>
           <p:cNvSpPr txBox="1"/>
           <p:nvPr/>
         </p:nvSpPr>
@@ -28200,6 +28244,1637 @@
                 <a:latin typeface="Tahoma"/>
               </a:rPr>
               <a:t>23</a:t>
+            </a:r>
+          </a:p>
+        </p:txBody>
+      </p:sp>
+      <p:sp>
+        <p:nvSpPr>
+          <p:cNvPr id="7" name="Oval 6"/>
+          <p:cNvSpPr/>
+          <p:nvPr/>
+        </p:nvSpPr>
+        <p:spPr>
+          <a:xfrm>
+            <a:off x="822960" y="1783080"/>
+            <a:ext cx="1920240" cy="1920240"/>
+          </a:xfrm>
+          <a:prstGeom prst="ellipse">
+            <a:avLst/>
+          </a:prstGeom>
+          <a:solidFill>
+            <a:srgbClr val="F2F2F2"/>
+          </a:solidFill>
+          <a:ln w="25400">
+            <a:solidFill>
+              <a:srgbClr val="D95323"/>
+            </a:solidFill>
+          </a:ln>
+          <a:effectLst/>
+        </p:spPr>
+        <p:style>
+          <a:lnRef idx="1">
+            <a:schemeClr val="accent1"/>
+          </a:lnRef>
+          <a:fillRef idx="3">
+            <a:schemeClr val="accent1"/>
+          </a:fillRef>
+          <a:effectRef idx="2">
+            <a:schemeClr val="accent1"/>
+          </a:effectRef>
+          <a:fontRef idx="minor">
+            <a:schemeClr val="lt1"/>
+          </a:fontRef>
+        </p:style>
+        <p:txBody>
+          <a:bodyPr rtlCol="0" anchor="ctr"/>
+          <a:lstStyle/>
+          <a:p>
+            <a:pPr algn="ctr"/>
+          </a:p>
+        </p:txBody>
+      </p:sp>
+      <p:sp>
+        <p:nvSpPr>
+          <p:cNvPr id="8" name="TextBox 7"/>
+          <p:cNvSpPr txBox="1"/>
+          <p:nvPr/>
+        </p:nvSpPr>
+        <p:spPr>
+          <a:xfrm>
+            <a:off x="822960" y="1783080"/>
+            <a:ext cx="1920240" cy="1920240"/>
+          </a:xfrm>
+          <a:prstGeom prst="rect">
+            <a:avLst/>
+          </a:prstGeom>
+          <a:noFill/>
+        </p:spPr>
+        <p:txBody>
+          <a:bodyPr wrap="square" anchor="ctr" lIns="27432" rIns="27432" tIns="9144" bIns="9144">
+            <a:spAutoFit/>
+          </a:bodyPr>
+          <a:lstStyle/>
+          <a:p>
+            <a:pPr algn="ctr">
+              <a:spcBef>
+                <a:spcPts val="0"/>
+              </a:spcBef>
+              <a:spcAft>
+                <a:spcPts val="200"/>
+              </a:spcAft>
+            </a:pPr>
+            <a:r>
+              <a:rPr sz="6300" b="0" i="0">
+                <a:solidFill>
+                  <a:srgbClr val="068734"/>
+                </a:solidFill>
+                <a:latin typeface="Segoe UI Emoji"/>
+              </a:rPr>
+              <a:t>🏭</a:t>
+            </a:r>
+          </a:p>
+        </p:txBody>
+      </p:sp>
+      <p:sp>
+        <p:nvSpPr>
+          <p:cNvPr id="9" name="TextBox 8"/>
+          <p:cNvSpPr txBox="1"/>
+          <p:nvPr/>
+        </p:nvSpPr>
+        <p:spPr>
+          <a:xfrm>
+            <a:off x="457200" y="3749039"/>
+            <a:ext cx="2651760" cy="731520"/>
+          </a:xfrm>
+          <a:prstGeom prst="rect">
+            <a:avLst/>
+          </a:prstGeom>
+          <a:noFill/>
+        </p:spPr>
+        <p:txBody>
+          <a:bodyPr wrap="square" anchor="t" lIns="27432" rIns="27432" tIns="9144" bIns="9144">
+            <a:spAutoFit/>
+          </a:bodyPr>
+          <a:lstStyle/>
+          <a:p>
+            <a:pPr algn="ctr">
+              <a:spcBef>
+                <a:spcPts val="0"/>
+              </a:spcBef>
+              <a:spcAft>
+                <a:spcPts val="200"/>
+              </a:spcAft>
+            </a:pPr>
+            <a:r>
+              <a:rPr sz="2000" b="1" i="0">
+                <a:solidFill>
+                  <a:srgbClr val="D95323"/>
+                </a:solidFill>
+                <a:latin typeface="Tahoma"/>
+              </a:rPr>
+              <a:t>TSAT</a:t>
+            </a:r>
+          </a:p>
+          <a:p>
+            <a:pPr algn="ctr">
+              <a:spcBef>
+                <a:spcPts val="0"/>
+              </a:spcBef>
+              <a:spcAft>
+                <a:spcPts val="200"/>
+              </a:spcAft>
+            </a:pPr>
+            <a:r>
+              <a:rPr sz="1250" b="0" i="0">
+                <a:solidFill>
+                  <a:srgbClr val="555555"/>
+                </a:solidFill>
+                <a:latin typeface="Tahoma"/>
+              </a:rPr>
+              <a:t>ใช้งานจริงวันนี้</a:t>
+            </a:r>
+          </a:p>
+        </p:txBody>
+      </p:sp>
+      <p:sp>
+        <p:nvSpPr>
+          <p:cNvPr id="10" name="Right Arrow 9"/>
+          <p:cNvSpPr/>
+          <p:nvPr/>
+        </p:nvSpPr>
+        <p:spPr>
+          <a:xfrm>
+            <a:off x="3063240" y="1920240"/>
+            <a:ext cx="1005840" cy="384048"/>
+          </a:xfrm>
+          <a:prstGeom prst="rightArrow">
+            <a:avLst/>
+          </a:prstGeom>
+          <a:solidFill>
+            <a:srgbClr val="068734"/>
+          </a:solidFill>
+          <a:ln>
+            <a:noFill/>
+          </a:ln>
+          <a:effectLst/>
+        </p:spPr>
+        <p:style>
+          <a:lnRef idx="1">
+            <a:schemeClr val="accent1"/>
+          </a:lnRef>
+          <a:fillRef idx="3">
+            <a:schemeClr val="accent1"/>
+          </a:fillRef>
+          <a:effectRef idx="2">
+            <a:schemeClr val="accent1"/>
+          </a:effectRef>
+          <a:fontRef idx="minor">
+            <a:schemeClr val="lt1"/>
+          </a:fontRef>
+        </p:style>
+        <p:txBody>
+          <a:bodyPr rtlCol="0" anchor="ctr"/>
+          <a:lstStyle/>
+          <a:p>
+            <a:pPr algn="ctr"/>
+          </a:p>
+        </p:txBody>
+      </p:sp>
+      <p:sp>
+        <p:nvSpPr>
+          <p:cNvPr id="11" name="Oval 10"/>
+          <p:cNvSpPr/>
+          <p:nvPr/>
+        </p:nvSpPr>
+        <p:spPr>
+          <a:xfrm>
+            <a:off x="4206240" y="1691640"/>
+            <a:ext cx="868680" cy="868680"/>
+          </a:xfrm>
+          <a:prstGeom prst="ellipse">
+            <a:avLst/>
+          </a:prstGeom>
+          <a:solidFill>
+            <a:srgbClr val="FFFFFF"/>
+          </a:solidFill>
+          <a:ln w="25400">
+            <a:solidFill>
+              <a:srgbClr val="068734"/>
+            </a:solidFill>
+          </a:ln>
+          <a:effectLst/>
+        </p:spPr>
+        <p:style>
+          <a:lnRef idx="1">
+            <a:schemeClr val="accent1"/>
+          </a:lnRef>
+          <a:fillRef idx="3">
+            <a:schemeClr val="accent1"/>
+          </a:fillRef>
+          <a:effectRef idx="2">
+            <a:schemeClr val="accent1"/>
+          </a:effectRef>
+          <a:fontRef idx="minor">
+            <a:schemeClr val="lt1"/>
+          </a:fontRef>
+        </p:style>
+        <p:txBody>
+          <a:bodyPr rtlCol="0" anchor="ctr"/>
+          <a:lstStyle/>
+          <a:p>
+            <a:pPr algn="ctr"/>
+          </a:p>
+        </p:txBody>
+      </p:sp>
+      <p:sp>
+        <p:nvSpPr>
+          <p:cNvPr id="12" name="TextBox 11"/>
+          <p:cNvSpPr txBox="1"/>
+          <p:nvPr/>
+        </p:nvSpPr>
+        <p:spPr>
+          <a:xfrm>
+            <a:off x="4206240" y="1691640"/>
+            <a:ext cx="868680" cy="868680"/>
+          </a:xfrm>
+          <a:prstGeom prst="rect">
+            <a:avLst/>
+          </a:prstGeom>
+          <a:noFill/>
+        </p:spPr>
+        <p:txBody>
+          <a:bodyPr wrap="square" anchor="ctr" lIns="27432" rIns="27432" tIns="9144" bIns="9144">
+            <a:spAutoFit/>
+          </a:bodyPr>
+          <a:lstStyle/>
+          <a:p>
+            <a:pPr algn="ctr">
+              <a:spcBef>
+                <a:spcPts val="0"/>
+              </a:spcBef>
+              <a:spcAft>
+                <a:spcPts val="200"/>
+              </a:spcAft>
+            </a:pPr>
+            <a:r>
+              <a:rPr sz="2800" b="0" i="0">
+                <a:solidFill>
+                  <a:srgbClr val="068734"/>
+                </a:solidFill>
+                <a:latin typeface="Segoe UI Emoji"/>
+              </a:rPr>
+              <a:t>🏭</a:t>
+            </a:r>
+          </a:p>
+        </p:txBody>
+      </p:sp>
+      <p:sp>
+        <p:nvSpPr>
+          <p:cNvPr id="13" name="TextBox 12"/>
+          <p:cNvSpPr txBox="1"/>
+          <p:nvPr/>
+        </p:nvSpPr>
+        <p:spPr>
+          <a:xfrm>
+            <a:off x="5166360" y="1874520"/>
+            <a:ext cx="1737360" cy="502920"/>
+          </a:xfrm>
+          <a:prstGeom prst="rect">
+            <a:avLst/>
+          </a:prstGeom>
+          <a:noFill/>
+        </p:spPr>
+        <p:txBody>
+          <a:bodyPr wrap="square" anchor="ctr" lIns="27432" rIns="27432" tIns="9144" bIns="9144">
+            <a:spAutoFit/>
+          </a:bodyPr>
+          <a:lstStyle/>
+          <a:p>
+            <a:pPr algn="l">
+              <a:spcBef>
+                <a:spcPts val="0"/>
+              </a:spcBef>
+              <a:spcAft>
+                <a:spcPts val="200"/>
+              </a:spcAft>
+            </a:pPr>
+            <a:r>
+              <a:rPr sz="1500" b="1" i="0">
+                <a:solidFill>
+                  <a:srgbClr val="0D3D14"/>
+                </a:solidFill>
+                <a:latin typeface="Tahoma"/>
+              </a:rPr>
+              <a:t>โรงงาน A</a:t>
+            </a:r>
+          </a:p>
+        </p:txBody>
+      </p:sp>
+      <p:sp>
+        <p:nvSpPr>
+          <p:cNvPr id="14" name="Right Arrow 13"/>
+          <p:cNvSpPr/>
+          <p:nvPr/>
+        </p:nvSpPr>
+        <p:spPr>
+          <a:xfrm>
+            <a:off x="3063240" y="3017520"/>
+            <a:ext cx="1005840" cy="384048"/>
+          </a:xfrm>
+          <a:prstGeom prst="rightArrow">
+            <a:avLst/>
+          </a:prstGeom>
+          <a:solidFill>
+            <a:srgbClr val="068734"/>
+          </a:solidFill>
+          <a:ln>
+            <a:noFill/>
+          </a:ln>
+          <a:effectLst/>
+        </p:spPr>
+        <p:style>
+          <a:lnRef idx="1">
+            <a:schemeClr val="accent1"/>
+          </a:lnRef>
+          <a:fillRef idx="3">
+            <a:schemeClr val="accent1"/>
+          </a:fillRef>
+          <a:effectRef idx="2">
+            <a:schemeClr val="accent1"/>
+          </a:effectRef>
+          <a:fontRef idx="minor">
+            <a:schemeClr val="lt1"/>
+          </a:fontRef>
+        </p:style>
+        <p:txBody>
+          <a:bodyPr rtlCol="0" anchor="ctr"/>
+          <a:lstStyle/>
+          <a:p>
+            <a:pPr algn="ctr"/>
+          </a:p>
+        </p:txBody>
+      </p:sp>
+      <p:sp>
+        <p:nvSpPr>
+          <p:cNvPr id="15" name="Oval 14"/>
+          <p:cNvSpPr/>
+          <p:nvPr/>
+        </p:nvSpPr>
+        <p:spPr>
+          <a:xfrm>
+            <a:off x="4206240" y="2788920"/>
+            <a:ext cx="868680" cy="868680"/>
+          </a:xfrm>
+          <a:prstGeom prst="ellipse">
+            <a:avLst/>
+          </a:prstGeom>
+          <a:solidFill>
+            <a:srgbClr val="FFFFFF"/>
+          </a:solidFill>
+          <a:ln w="25400">
+            <a:solidFill>
+              <a:srgbClr val="068734"/>
+            </a:solidFill>
+          </a:ln>
+          <a:effectLst/>
+        </p:spPr>
+        <p:style>
+          <a:lnRef idx="1">
+            <a:schemeClr val="accent1"/>
+          </a:lnRef>
+          <a:fillRef idx="3">
+            <a:schemeClr val="accent1"/>
+          </a:fillRef>
+          <a:effectRef idx="2">
+            <a:schemeClr val="accent1"/>
+          </a:effectRef>
+          <a:fontRef idx="minor">
+            <a:schemeClr val="lt1"/>
+          </a:fontRef>
+        </p:style>
+        <p:txBody>
+          <a:bodyPr rtlCol="0" anchor="ctr"/>
+          <a:lstStyle/>
+          <a:p>
+            <a:pPr algn="ctr"/>
+          </a:p>
+        </p:txBody>
+      </p:sp>
+      <p:sp>
+        <p:nvSpPr>
+          <p:cNvPr id="16" name="TextBox 15"/>
+          <p:cNvSpPr txBox="1"/>
+          <p:nvPr/>
+        </p:nvSpPr>
+        <p:spPr>
+          <a:xfrm>
+            <a:off x="4206240" y="2788920"/>
+            <a:ext cx="868680" cy="868680"/>
+          </a:xfrm>
+          <a:prstGeom prst="rect">
+            <a:avLst/>
+          </a:prstGeom>
+          <a:noFill/>
+        </p:spPr>
+        <p:txBody>
+          <a:bodyPr wrap="square" anchor="ctr" lIns="27432" rIns="27432" tIns="9144" bIns="9144">
+            <a:spAutoFit/>
+          </a:bodyPr>
+          <a:lstStyle/>
+          <a:p>
+            <a:pPr algn="ctr">
+              <a:spcBef>
+                <a:spcPts val="0"/>
+              </a:spcBef>
+              <a:spcAft>
+                <a:spcPts val="200"/>
+              </a:spcAft>
+            </a:pPr>
+            <a:r>
+              <a:rPr sz="2800" b="0" i="0">
+                <a:solidFill>
+                  <a:srgbClr val="068734"/>
+                </a:solidFill>
+                <a:latin typeface="Segoe UI Emoji"/>
+              </a:rPr>
+              <a:t>🏭</a:t>
+            </a:r>
+          </a:p>
+        </p:txBody>
+      </p:sp>
+      <p:sp>
+        <p:nvSpPr>
+          <p:cNvPr id="17" name="TextBox 16"/>
+          <p:cNvSpPr txBox="1"/>
+          <p:nvPr/>
+        </p:nvSpPr>
+        <p:spPr>
+          <a:xfrm>
+            <a:off x="5166360" y="2971800"/>
+            <a:ext cx="1737360" cy="502920"/>
+          </a:xfrm>
+          <a:prstGeom prst="rect">
+            <a:avLst/>
+          </a:prstGeom>
+          <a:noFill/>
+        </p:spPr>
+        <p:txBody>
+          <a:bodyPr wrap="square" anchor="ctr" lIns="27432" rIns="27432" tIns="9144" bIns="9144">
+            <a:spAutoFit/>
+          </a:bodyPr>
+          <a:lstStyle/>
+          <a:p>
+            <a:pPr algn="l">
+              <a:spcBef>
+                <a:spcPts val="0"/>
+              </a:spcBef>
+              <a:spcAft>
+                <a:spcPts val="200"/>
+              </a:spcAft>
+            </a:pPr>
+            <a:r>
+              <a:rPr sz="1500" b="1" i="0">
+                <a:solidFill>
+                  <a:srgbClr val="0D3D14"/>
+                </a:solidFill>
+                <a:latin typeface="Tahoma"/>
+              </a:rPr>
+              <a:t>โรงงาน B</a:t>
+            </a:r>
+          </a:p>
+        </p:txBody>
+      </p:sp>
+      <p:sp>
+        <p:nvSpPr>
+          <p:cNvPr id="18" name="Right Arrow 17"/>
+          <p:cNvSpPr/>
+          <p:nvPr/>
+        </p:nvSpPr>
+        <p:spPr>
+          <a:xfrm>
+            <a:off x="3063240" y="4114800"/>
+            <a:ext cx="1005840" cy="384048"/>
+          </a:xfrm>
+          <a:prstGeom prst="rightArrow">
+            <a:avLst/>
+          </a:prstGeom>
+          <a:solidFill>
+            <a:srgbClr val="068734"/>
+          </a:solidFill>
+          <a:ln>
+            <a:noFill/>
+          </a:ln>
+          <a:effectLst/>
+        </p:spPr>
+        <p:style>
+          <a:lnRef idx="1">
+            <a:schemeClr val="accent1"/>
+          </a:lnRef>
+          <a:fillRef idx="3">
+            <a:schemeClr val="accent1"/>
+          </a:fillRef>
+          <a:effectRef idx="2">
+            <a:schemeClr val="accent1"/>
+          </a:effectRef>
+          <a:fontRef idx="minor">
+            <a:schemeClr val="lt1"/>
+          </a:fontRef>
+        </p:style>
+        <p:txBody>
+          <a:bodyPr rtlCol="0" anchor="ctr"/>
+          <a:lstStyle/>
+          <a:p>
+            <a:pPr algn="ctr"/>
+          </a:p>
+        </p:txBody>
+      </p:sp>
+      <p:sp>
+        <p:nvSpPr>
+          <p:cNvPr id="19" name="Oval 18"/>
+          <p:cNvSpPr/>
+          <p:nvPr/>
+        </p:nvSpPr>
+        <p:spPr>
+          <a:xfrm>
+            <a:off x="4206240" y="3886200"/>
+            <a:ext cx="868680" cy="868680"/>
+          </a:xfrm>
+          <a:prstGeom prst="ellipse">
+            <a:avLst/>
+          </a:prstGeom>
+          <a:solidFill>
+            <a:srgbClr val="FFFFFF"/>
+          </a:solidFill>
+          <a:ln w="25400">
+            <a:solidFill>
+              <a:srgbClr val="068734"/>
+            </a:solidFill>
+          </a:ln>
+          <a:effectLst/>
+        </p:spPr>
+        <p:style>
+          <a:lnRef idx="1">
+            <a:schemeClr val="accent1"/>
+          </a:lnRef>
+          <a:fillRef idx="3">
+            <a:schemeClr val="accent1"/>
+          </a:fillRef>
+          <a:effectRef idx="2">
+            <a:schemeClr val="accent1"/>
+          </a:effectRef>
+          <a:fontRef idx="minor">
+            <a:schemeClr val="lt1"/>
+          </a:fontRef>
+        </p:style>
+        <p:txBody>
+          <a:bodyPr rtlCol="0" anchor="ctr"/>
+          <a:lstStyle/>
+          <a:p>
+            <a:pPr algn="ctr"/>
+          </a:p>
+        </p:txBody>
+      </p:sp>
+      <p:sp>
+        <p:nvSpPr>
+          <p:cNvPr id="20" name="TextBox 19"/>
+          <p:cNvSpPr txBox="1"/>
+          <p:nvPr/>
+        </p:nvSpPr>
+        <p:spPr>
+          <a:xfrm>
+            <a:off x="4206240" y="3886200"/>
+            <a:ext cx="868680" cy="868680"/>
+          </a:xfrm>
+          <a:prstGeom prst="rect">
+            <a:avLst/>
+          </a:prstGeom>
+          <a:noFill/>
+        </p:spPr>
+        <p:txBody>
+          <a:bodyPr wrap="square" anchor="ctr" lIns="27432" rIns="27432" tIns="9144" bIns="9144">
+            <a:spAutoFit/>
+          </a:bodyPr>
+          <a:lstStyle/>
+          <a:p>
+            <a:pPr algn="ctr">
+              <a:spcBef>
+                <a:spcPts val="0"/>
+              </a:spcBef>
+              <a:spcAft>
+                <a:spcPts val="200"/>
+              </a:spcAft>
+            </a:pPr>
+            <a:r>
+              <a:rPr sz="2800" b="0" i="0">
+                <a:solidFill>
+                  <a:srgbClr val="068734"/>
+                </a:solidFill>
+                <a:latin typeface="Segoe UI Emoji"/>
+              </a:rPr>
+              <a:t>🏭</a:t>
+            </a:r>
+          </a:p>
+        </p:txBody>
+      </p:sp>
+      <p:sp>
+        <p:nvSpPr>
+          <p:cNvPr id="21" name="TextBox 20"/>
+          <p:cNvSpPr txBox="1"/>
+          <p:nvPr/>
+        </p:nvSpPr>
+        <p:spPr>
+          <a:xfrm>
+            <a:off x="5166360" y="4069080"/>
+            <a:ext cx="1737360" cy="502920"/>
+          </a:xfrm>
+          <a:prstGeom prst="rect">
+            <a:avLst/>
+          </a:prstGeom>
+          <a:noFill/>
+        </p:spPr>
+        <p:txBody>
+          <a:bodyPr wrap="square" anchor="ctr" lIns="27432" rIns="27432" tIns="9144" bIns="9144">
+            <a:spAutoFit/>
+          </a:bodyPr>
+          <a:lstStyle/>
+          <a:p>
+            <a:pPr algn="l">
+              <a:spcBef>
+                <a:spcPts val="0"/>
+              </a:spcBef>
+              <a:spcAft>
+                <a:spcPts val="200"/>
+              </a:spcAft>
+            </a:pPr>
+            <a:r>
+              <a:rPr sz="1500" b="1" i="0">
+                <a:solidFill>
+                  <a:srgbClr val="0D3D14"/>
+                </a:solidFill>
+                <a:latin typeface="Tahoma"/>
+              </a:rPr>
+              <a:t>โรงงาน C</a:t>
+            </a:r>
+          </a:p>
+        </p:txBody>
+      </p:sp>
+      <p:sp>
+        <p:nvSpPr>
+          <p:cNvPr id="22" name="TextBox 21"/>
+          <p:cNvSpPr txBox="1"/>
+          <p:nvPr/>
+        </p:nvSpPr>
+        <p:spPr>
+          <a:xfrm>
+            <a:off x="4206240" y="4846320"/>
+            <a:ext cx="2743200" cy="365760"/>
+          </a:xfrm>
+          <a:prstGeom prst="rect">
+            <a:avLst/>
+          </a:prstGeom>
+          <a:noFill/>
+        </p:spPr>
+        <p:txBody>
+          <a:bodyPr wrap="square" anchor="t" lIns="27432" rIns="27432" tIns="9144" bIns="9144">
+            <a:spAutoFit/>
+          </a:bodyPr>
+          <a:lstStyle/>
+          <a:p>
+            <a:pPr algn="l">
+              <a:spcBef>
+                <a:spcPts val="0"/>
+              </a:spcBef>
+              <a:spcAft>
+                <a:spcPts val="200"/>
+              </a:spcAft>
+            </a:pPr>
+            <a:r>
+              <a:rPr sz="1250" b="0" i="0">
+                <a:solidFill>
+                  <a:srgbClr val="555555"/>
+                </a:solidFill>
+                <a:latin typeface="Tahoma"/>
+              </a:rPr>
+              <a:t>ข้อมูลแยก · ผู้ใช้แยก</a:t>
+            </a:r>
+          </a:p>
+        </p:txBody>
+      </p:sp>
+      <p:sp>
+        <p:nvSpPr>
+          <p:cNvPr id="23" name="Rounded Rectangle 22"/>
+          <p:cNvSpPr/>
+          <p:nvPr/>
+        </p:nvSpPr>
+        <p:spPr>
+          <a:xfrm>
+            <a:off x="7086600" y="1600200"/>
+            <a:ext cx="4663440" cy="3794760"/>
+          </a:xfrm>
+          <a:prstGeom prst="roundRect">
+            <a:avLst/>
+          </a:prstGeom>
+          <a:solidFill>
+            <a:srgbClr val="FFFFFF"/>
+          </a:solidFill>
+          <a:ln w="9525">
+            <a:solidFill>
+              <a:srgbClr val="D9D9D9"/>
+            </a:solidFill>
+          </a:ln>
+          <a:effectLst/>
+          <a:effectLst>
+            <a:outerShdw blurRad="50000" dist="20000" dir="5400000" rotWithShape="0">
+              <a:srgbClr val="8A99AD">
+                <a:alpha val="30000"/>
+              </a:srgbClr>
+            </a:outerShdw>
+          </a:effectLst>
+        </p:spPr>
+        <p:style>
+          <a:lnRef idx="1">
+            <a:schemeClr val="accent1"/>
+          </a:lnRef>
+          <a:fillRef idx="3">
+            <a:schemeClr val="accent1"/>
+          </a:fillRef>
+          <a:effectRef idx="2">
+            <a:schemeClr val="accent1"/>
+          </a:effectRef>
+          <a:fontRef idx="minor">
+            <a:schemeClr val="lt1"/>
+          </a:fontRef>
+        </p:style>
+        <p:txBody>
+          <a:bodyPr rtlCol="0" anchor="ctr"/>
+          <a:lstStyle/>
+          <a:p>
+            <a:pPr algn="ctr"/>
+          </a:p>
+        </p:txBody>
+      </p:sp>
+      <p:sp>
+        <p:nvSpPr>
+          <p:cNvPr id="24" name="Rectangle 23"/>
+          <p:cNvSpPr/>
+          <p:nvPr/>
+        </p:nvSpPr>
+        <p:spPr>
+          <a:xfrm>
+            <a:off x="7086600" y="1600200"/>
+            <a:ext cx="4663440" cy="420624"/>
+          </a:xfrm>
+          <a:prstGeom prst="rect">
+            <a:avLst/>
+          </a:prstGeom>
+          <a:solidFill>
+            <a:srgbClr val="0D3D14"/>
+          </a:solidFill>
+          <a:ln>
+            <a:noFill/>
+          </a:ln>
+          <a:effectLst/>
+        </p:spPr>
+        <p:style>
+          <a:lnRef idx="1">
+            <a:schemeClr val="accent1"/>
+          </a:lnRef>
+          <a:fillRef idx="3">
+            <a:schemeClr val="accent1"/>
+          </a:fillRef>
+          <a:effectRef idx="2">
+            <a:schemeClr val="accent1"/>
+          </a:effectRef>
+          <a:fontRef idx="minor">
+            <a:schemeClr val="lt1"/>
+          </a:fontRef>
+        </p:style>
+        <p:txBody>
+          <a:bodyPr rtlCol="0" anchor="ctr"/>
+          <a:lstStyle/>
+          <a:p>
+            <a:pPr algn="ctr"/>
+          </a:p>
+        </p:txBody>
+      </p:sp>
+      <p:sp>
+        <p:nvSpPr>
+          <p:cNvPr id="25" name="TextBox 24"/>
+          <p:cNvSpPr txBox="1"/>
+          <p:nvPr/>
+        </p:nvSpPr>
+        <p:spPr>
+          <a:xfrm>
+            <a:off x="7086600" y="1600200"/>
+            <a:ext cx="4663440" cy="420624"/>
+          </a:xfrm>
+          <a:prstGeom prst="rect">
+            <a:avLst/>
+          </a:prstGeom>
+          <a:noFill/>
+        </p:spPr>
+        <p:txBody>
+          <a:bodyPr wrap="square" anchor="ctr" lIns="27432" rIns="27432" tIns="9144" bIns="9144">
+            <a:spAutoFit/>
+          </a:bodyPr>
+          <a:lstStyle/>
+          <a:p>
+            <a:pPr algn="ctr">
+              <a:spcBef>
+                <a:spcPts val="0"/>
+              </a:spcBef>
+              <a:spcAft>
+                <a:spcPts val="200"/>
+              </a:spcAft>
+            </a:pPr>
+            <a:r>
+              <a:rPr sz="1500" b="1" i="0">
+                <a:solidFill>
+                  <a:srgbClr val="FFFFFF"/>
+                </a:solidFill>
+                <a:latin typeface="Tahoma"/>
+              </a:rPr>
+              <a:t>โรงงานใหม่เตรียม 3 อย่าง</a:t>
+            </a:r>
+          </a:p>
+        </p:txBody>
+      </p:sp>
+      <p:sp>
+        <p:nvSpPr>
+          <p:cNvPr id="26" name="Oval 25"/>
+          <p:cNvSpPr/>
+          <p:nvPr/>
+        </p:nvSpPr>
+        <p:spPr>
+          <a:xfrm>
+            <a:off x="7315200" y="2194560"/>
+            <a:ext cx="822960" cy="822960"/>
+          </a:xfrm>
+          <a:prstGeom prst="ellipse">
+            <a:avLst/>
+          </a:prstGeom>
+          <a:solidFill>
+            <a:srgbClr val="F2F2F2"/>
+          </a:solidFill>
+          <a:ln>
+            <a:noFill/>
+          </a:ln>
+          <a:effectLst/>
+        </p:spPr>
+        <p:style>
+          <a:lnRef idx="1">
+            <a:schemeClr val="accent1"/>
+          </a:lnRef>
+          <a:fillRef idx="3">
+            <a:schemeClr val="accent1"/>
+          </a:fillRef>
+          <a:effectRef idx="2">
+            <a:schemeClr val="accent1"/>
+          </a:effectRef>
+          <a:fontRef idx="minor">
+            <a:schemeClr val="lt1"/>
+          </a:fontRef>
+        </p:style>
+        <p:txBody>
+          <a:bodyPr rtlCol="0" anchor="ctr"/>
+          <a:lstStyle/>
+          <a:p>
+            <a:pPr algn="ctr"/>
+          </a:p>
+        </p:txBody>
+      </p:sp>
+      <p:sp>
+        <p:nvSpPr>
+          <p:cNvPr id="27" name="TextBox 26"/>
+          <p:cNvSpPr txBox="1"/>
+          <p:nvPr/>
+        </p:nvSpPr>
+        <p:spPr>
+          <a:xfrm>
+            <a:off x="7315200" y="2194560"/>
+            <a:ext cx="822960" cy="822960"/>
+          </a:xfrm>
+          <a:prstGeom prst="rect">
+            <a:avLst/>
+          </a:prstGeom>
+          <a:noFill/>
+        </p:spPr>
+        <p:txBody>
+          <a:bodyPr wrap="square" anchor="ctr" lIns="27432" rIns="27432" tIns="9144" bIns="9144">
+            <a:spAutoFit/>
+          </a:bodyPr>
+          <a:lstStyle/>
+          <a:p>
+            <a:pPr algn="ctr">
+              <a:spcBef>
+                <a:spcPts val="0"/>
+              </a:spcBef>
+              <a:spcAft>
+                <a:spcPts val="200"/>
+              </a:spcAft>
+            </a:pPr>
+            <a:r>
+              <a:rPr sz="2700" b="0" i="0">
+                <a:solidFill>
+                  <a:srgbClr val="068734"/>
+                </a:solidFill>
+                <a:latin typeface="Segoe UI Emoji"/>
+              </a:rPr>
+              <a:t>🖥️</a:t>
+            </a:r>
+          </a:p>
+        </p:txBody>
+      </p:sp>
+      <p:sp>
+        <p:nvSpPr>
+          <p:cNvPr id="28" name="TextBox 27"/>
+          <p:cNvSpPr txBox="1"/>
+          <p:nvPr/>
+        </p:nvSpPr>
+        <p:spPr>
+          <a:xfrm>
+            <a:off x="8321040" y="2212848"/>
+            <a:ext cx="3291840" cy="822960"/>
+          </a:xfrm>
+          <a:prstGeom prst="rect">
+            <a:avLst/>
+          </a:prstGeom>
+          <a:noFill/>
+        </p:spPr>
+        <p:txBody>
+          <a:bodyPr wrap="square" anchor="ctr" lIns="27432" rIns="27432" tIns="9144" bIns="9144">
+            <a:spAutoFit/>
+          </a:bodyPr>
+          <a:lstStyle/>
+          <a:p>
+            <a:pPr algn="l">
+              <a:spcBef>
+                <a:spcPts val="0"/>
+              </a:spcBef>
+              <a:spcAft>
+                <a:spcPts val="200"/>
+              </a:spcAft>
+            </a:pPr>
+            <a:r>
+              <a:rPr sz="1500" b="1" i="0">
+                <a:solidFill>
+                  <a:srgbClr val="0D3D14"/>
+                </a:solidFill>
+                <a:latin typeface="Tahoma"/>
+              </a:rPr>
+              <a:t>ที่ตั้งระบบ</a:t>
+            </a:r>
+          </a:p>
+          <a:p>
+            <a:pPr algn="l">
+              <a:spcBef>
+                <a:spcPts val="0"/>
+              </a:spcBef>
+              <a:spcAft>
+                <a:spcPts val="200"/>
+              </a:spcAft>
+            </a:pPr>
+            <a:r>
+              <a:rPr sz="1250" b="0" i="0">
+                <a:solidFill>
+                  <a:srgbClr val="555555"/>
+                </a:solidFill>
+                <a:latin typeface="Tahoma"/>
+              </a:rPr>
+              <a:t>IT · ไม่กี่วัน</a:t>
+            </a:r>
+          </a:p>
+        </p:txBody>
+      </p:sp>
+      <p:sp>
+        <p:nvSpPr>
+          <p:cNvPr id="29" name="Oval 28"/>
+          <p:cNvSpPr/>
+          <p:nvPr/>
+        </p:nvSpPr>
+        <p:spPr>
+          <a:xfrm>
+            <a:off x="7315200" y="3218688"/>
+            <a:ext cx="822960" cy="822960"/>
+          </a:xfrm>
+          <a:prstGeom prst="ellipse">
+            <a:avLst/>
+          </a:prstGeom>
+          <a:solidFill>
+            <a:srgbClr val="F2F2F2"/>
+          </a:solidFill>
+          <a:ln>
+            <a:noFill/>
+          </a:ln>
+          <a:effectLst/>
+        </p:spPr>
+        <p:style>
+          <a:lnRef idx="1">
+            <a:schemeClr val="accent1"/>
+          </a:lnRef>
+          <a:fillRef idx="3">
+            <a:schemeClr val="accent1"/>
+          </a:fillRef>
+          <a:effectRef idx="2">
+            <a:schemeClr val="accent1"/>
+          </a:effectRef>
+          <a:fontRef idx="minor">
+            <a:schemeClr val="lt1"/>
+          </a:fontRef>
+        </p:style>
+        <p:txBody>
+          <a:bodyPr rtlCol="0" anchor="ctr"/>
+          <a:lstStyle/>
+          <a:p>
+            <a:pPr algn="ctr"/>
+          </a:p>
+        </p:txBody>
+      </p:sp>
+      <p:sp>
+        <p:nvSpPr>
+          <p:cNvPr id="30" name="TextBox 29"/>
+          <p:cNvSpPr txBox="1"/>
+          <p:nvPr/>
+        </p:nvSpPr>
+        <p:spPr>
+          <a:xfrm>
+            <a:off x="7315200" y="3218688"/>
+            <a:ext cx="822960" cy="822960"/>
+          </a:xfrm>
+          <a:prstGeom prst="rect">
+            <a:avLst/>
+          </a:prstGeom>
+          <a:noFill/>
+        </p:spPr>
+        <p:txBody>
+          <a:bodyPr wrap="square" anchor="ctr" lIns="27432" rIns="27432" tIns="9144" bIns="9144">
+            <a:spAutoFit/>
+          </a:bodyPr>
+          <a:lstStyle/>
+          <a:p>
+            <a:pPr algn="ctr">
+              <a:spcBef>
+                <a:spcPts val="0"/>
+              </a:spcBef>
+              <a:spcAft>
+                <a:spcPts val="200"/>
+              </a:spcAft>
+            </a:pPr>
+            <a:r>
+              <a:rPr sz="2700" b="0" i="0">
+                <a:solidFill>
+                  <a:srgbClr val="068734"/>
+                </a:solidFill>
+                <a:latin typeface="Segoe UI Emoji"/>
+              </a:rPr>
+              <a:t>🛠️</a:t>
+            </a:r>
+          </a:p>
+        </p:txBody>
+      </p:sp>
+      <p:sp>
+        <p:nvSpPr>
+          <p:cNvPr id="31" name="TextBox 30"/>
+          <p:cNvSpPr txBox="1"/>
+          <p:nvPr/>
+        </p:nvSpPr>
+        <p:spPr>
+          <a:xfrm>
+            <a:off x="8321040" y="3236976"/>
+            <a:ext cx="3291840" cy="822960"/>
+          </a:xfrm>
+          <a:prstGeom prst="rect">
+            <a:avLst/>
+          </a:prstGeom>
+          <a:noFill/>
+        </p:spPr>
+        <p:txBody>
+          <a:bodyPr wrap="square" anchor="ctr" lIns="27432" rIns="27432" tIns="9144" bIns="9144">
+            <a:spAutoFit/>
+          </a:bodyPr>
+          <a:lstStyle/>
+          <a:p>
+            <a:pPr algn="l">
+              <a:spcBef>
+                <a:spcPts val="0"/>
+              </a:spcBef>
+              <a:spcAft>
+                <a:spcPts val="200"/>
+              </a:spcAft>
+            </a:pPr>
+            <a:r>
+              <a:rPr sz="1500" b="1" i="0">
+                <a:solidFill>
+                  <a:srgbClr val="0D3D14"/>
+                </a:solidFill>
+                <a:latin typeface="Tahoma"/>
+              </a:rPr>
+              <a:t>ชื่อ โลโก้ ฟอร์มของตัวเอง</a:t>
+            </a:r>
+          </a:p>
+          <a:p>
+            <a:pPr algn="l">
+              <a:spcBef>
+                <a:spcPts val="0"/>
+              </a:spcBef>
+              <a:spcAft>
+                <a:spcPts val="200"/>
+              </a:spcAft>
+            </a:pPr>
+            <a:r>
+              <a:rPr sz="1250" b="0" i="0">
+                <a:solidFill>
+                  <a:srgbClr val="555555"/>
+                </a:solidFill>
+                <a:latin typeface="Tahoma"/>
+              </a:rPr>
+              <a:t>ทีม ESM</a:t>
+            </a:r>
+          </a:p>
+        </p:txBody>
+      </p:sp>
+      <p:sp>
+        <p:nvSpPr>
+          <p:cNvPr id="32" name="Oval 31"/>
+          <p:cNvSpPr/>
+          <p:nvPr/>
+        </p:nvSpPr>
+        <p:spPr>
+          <a:xfrm>
+            <a:off x="7315200" y="4242816"/>
+            <a:ext cx="822960" cy="822960"/>
+          </a:xfrm>
+          <a:prstGeom prst="ellipse">
+            <a:avLst/>
+          </a:prstGeom>
+          <a:solidFill>
+            <a:srgbClr val="F2F2F2"/>
+          </a:solidFill>
+          <a:ln>
+            <a:noFill/>
+          </a:ln>
+          <a:effectLst/>
+        </p:spPr>
+        <p:style>
+          <a:lnRef idx="1">
+            <a:schemeClr val="accent1"/>
+          </a:lnRef>
+          <a:fillRef idx="3">
+            <a:schemeClr val="accent1"/>
+          </a:fillRef>
+          <a:effectRef idx="2">
+            <a:schemeClr val="accent1"/>
+          </a:effectRef>
+          <a:fontRef idx="minor">
+            <a:schemeClr val="lt1"/>
+          </a:fontRef>
+        </p:style>
+        <p:txBody>
+          <a:bodyPr rtlCol="0" anchor="ctr"/>
+          <a:lstStyle/>
+          <a:p>
+            <a:pPr algn="ctr"/>
+          </a:p>
+        </p:txBody>
+      </p:sp>
+      <p:sp>
+        <p:nvSpPr>
+          <p:cNvPr id="33" name="TextBox 32"/>
+          <p:cNvSpPr txBox="1"/>
+          <p:nvPr/>
+        </p:nvSpPr>
+        <p:spPr>
+          <a:xfrm>
+            <a:off x="7315200" y="4242816"/>
+            <a:ext cx="822960" cy="822960"/>
+          </a:xfrm>
+          <a:prstGeom prst="rect">
+            <a:avLst/>
+          </a:prstGeom>
+          <a:noFill/>
+        </p:spPr>
+        <p:txBody>
+          <a:bodyPr wrap="square" anchor="ctr" lIns="27432" rIns="27432" tIns="9144" bIns="9144">
+            <a:spAutoFit/>
+          </a:bodyPr>
+          <a:lstStyle/>
+          <a:p>
+            <a:pPr algn="ctr">
+              <a:spcBef>
+                <a:spcPts val="0"/>
+              </a:spcBef>
+              <a:spcAft>
+                <a:spcPts val="200"/>
+              </a:spcAft>
+            </a:pPr>
+            <a:r>
+              <a:rPr sz="2700" b="0" i="0">
+                <a:solidFill>
+                  <a:srgbClr val="068734"/>
+                </a:solidFill>
+                <a:latin typeface="Segoe UI Emoji"/>
+              </a:rPr>
+              <a:t>📋</a:t>
+            </a:r>
+          </a:p>
+        </p:txBody>
+      </p:sp>
+      <p:sp>
+        <p:nvSpPr>
+          <p:cNvPr id="34" name="TextBox 33"/>
+          <p:cNvSpPr txBox="1"/>
+          <p:nvPr/>
+        </p:nvSpPr>
+        <p:spPr>
+          <a:xfrm>
+            <a:off x="8321040" y="4261104"/>
+            <a:ext cx="3291840" cy="822960"/>
+          </a:xfrm>
+          <a:prstGeom prst="rect">
+            <a:avLst/>
+          </a:prstGeom>
+          <a:noFill/>
+        </p:spPr>
+        <p:txBody>
+          <a:bodyPr wrap="square" anchor="ctr" lIns="27432" rIns="27432" tIns="9144" bIns="9144">
+            <a:spAutoFit/>
+          </a:bodyPr>
+          <a:lstStyle/>
+          <a:p>
+            <a:pPr algn="l">
+              <a:spcBef>
+                <a:spcPts val="0"/>
+              </a:spcBef>
+              <a:spcAft>
+                <a:spcPts val="200"/>
+              </a:spcAft>
+            </a:pPr>
+            <a:r>
+              <a:rPr sz="1500" b="1" i="0">
+                <a:solidFill>
+                  <a:srgbClr val="0D3D14"/>
+                </a:solidFill>
+                <a:latin typeface="Tahoma"/>
+              </a:rPr>
+              <a:t>ข้อมูลของโรงงาน</a:t>
+            </a:r>
+          </a:p>
+          <a:p>
+            <a:pPr algn="l">
+              <a:spcBef>
+                <a:spcPts val="0"/>
+              </a:spcBef>
+              <a:spcAft>
+                <a:spcPts val="200"/>
+              </a:spcAft>
+            </a:pPr>
+            <a:r>
+              <a:rPr sz="1250" b="0" i="0">
+                <a:solidFill>
+                  <a:srgbClr val="555555"/>
+                </a:solidFill>
+                <a:latin typeface="Tahoma"/>
+              </a:rPr>
+              <a:t>คน · ไลน์ · เครื่องจักร · สินค้า</a:t>
+            </a:r>
+          </a:p>
+        </p:txBody>
+      </p:sp>
+      <p:sp>
+        <p:nvSpPr>
+          <p:cNvPr id="35" name="Rectangle 34"/>
+          <p:cNvSpPr/>
+          <p:nvPr/>
+        </p:nvSpPr>
+        <p:spPr>
+          <a:xfrm>
+            <a:off x="457200" y="5577840"/>
+            <a:ext cx="11292840" cy="402336"/>
+          </a:xfrm>
+          <a:prstGeom prst="rect">
+            <a:avLst/>
+          </a:prstGeom>
+          <a:solidFill>
+            <a:srgbClr val="0D3D14"/>
+          </a:solidFill>
+          <a:ln>
+            <a:noFill/>
+          </a:ln>
+          <a:effectLst/>
+        </p:spPr>
+        <p:style>
+          <a:lnRef idx="1">
+            <a:schemeClr val="accent1"/>
+          </a:lnRef>
+          <a:fillRef idx="3">
+            <a:schemeClr val="accent1"/>
+          </a:fillRef>
+          <a:effectRef idx="2">
+            <a:schemeClr val="accent1"/>
+          </a:effectRef>
+          <a:fontRef idx="minor">
+            <a:schemeClr val="lt1"/>
+          </a:fontRef>
+        </p:style>
+        <p:txBody>
+          <a:bodyPr rtlCol="0" anchor="ctr"/>
+          <a:lstStyle/>
+          <a:p>
+            <a:pPr algn="ctr"/>
+          </a:p>
+        </p:txBody>
+      </p:sp>
+      <p:sp>
+        <p:nvSpPr>
+          <p:cNvPr id="36" name="TextBox 35"/>
+          <p:cNvSpPr txBox="1"/>
+          <p:nvPr/>
+        </p:nvSpPr>
+        <p:spPr>
+          <a:xfrm>
+            <a:off x="457200" y="5577840"/>
+            <a:ext cx="11292840" cy="402336"/>
+          </a:xfrm>
+          <a:prstGeom prst="rect">
+            <a:avLst/>
+          </a:prstGeom>
+          <a:noFill/>
+        </p:spPr>
+        <p:txBody>
+          <a:bodyPr wrap="square" anchor="ctr" lIns="27432" rIns="27432" tIns="9144" bIns="9144">
+            <a:spAutoFit/>
+          </a:bodyPr>
+          <a:lstStyle/>
+          <a:p>
+            <a:pPr algn="ctr">
+              <a:spcBef>
+                <a:spcPts val="0"/>
+              </a:spcBef>
+              <a:spcAft>
+                <a:spcPts val="200"/>
+              </a:spcAft>
+            </a:pPr>
+            <a:r>
+              <a:rPr sz="1850" b="1" i="0">
+                <a:solidFill>
+                  <a:srgbClr val="FFFFFF"/>
+                </a:solidFill>
+                <a:latin typeface="Tahoma"/>
+              </a:rPr>
+              <a:t>เริ่มที่ฝ่ายผลิต + ซ่อมบำรุง บนไลน์นำร่อง 1–2 ไลน์ แล้วค่อยเพิ่มแผนก</a:t>
+            </a:r>
+          </a:p>
+        </p:txBody>
+      </p:sp>
+    </p:spTree>
+  </p:cSld>
+  <p:clrMapOvr>
+    <a:masterClrMapping/>
+  </p:clrMapOvr>
+</p:sld>
+</file>
+
+<file path=ppt/slides/slide24.xml><?xml version="1.0" encoding="utf-8"?>
+<p:sld xmlns:a="http://schemas.openxmlformats.org/drawingml/2006/main" xmlns:p="http://schemas.openxmlformats.org/presentationml/2006/main" xmlns:r="http://schemas.openxmlformats.org/officeDocument/2006/relationships">
+  <p:cSld>
+    <p:spTree>
+      <p:nvGrpSpPr>
+        <p:cNvPr id="1" name=""/>
+        <p:cNvGrpSpPr/>
+        <p:nvPr/>
+      </p:nvGrpSpPr>
+      <p:grpSpPr/>
+      <p:sp>
+        <p:nvSpPr>
+          <p:cNvPr id="2" name="TextBox 1"/>
+          <p:cNvSpPr txBox="1"/>
+          <p:nvPr/>
+        </p:nvSpPr>
+        <p:spPr>
+          <a:xfrm>
+            <a:off x="822960" y="2779776"/>
+            <a:ext cx="10552176" cy="649224"/>
+          </a:xfrm>
+          <a:prstGeom prst="rect">
+            <a:avLst/>
+          </a:prstGeom>
+          <a:noFill/>
+        </p:spPr>
+        <p:txBody>
+          <a:bodyPr wrap="square" anchor="ctr" lIns="27432" rIns="27432" tIns="9144" bIns="9144">
+            <a:spAutoFit/>
+          </a:bodyPr>
+          <a:lstStyle/>
+          <a:p>
+            <a:pPr algn="ctr">
+              <a:spcBef>
+                <a:spcPts val="0"/>
+              </a:spcBef>
+              <a:spcAft>
+                <a:spcPts val="200"/>
+              </a:spcAft>
+            </a:pPr>
+            <a:r>
+              <a:rPr sz="3500" b="1" i="0">
+                <a:solidFill>
+                  <a:srgbClr val="068734"/>
+                </a:solidFill>
+                <a:latin typeface="Tahoma"/>
+              </a:rPr>
+              <a:t>Before We Build Parts, We Build People</a:t>
+            </a:r>
+          </a:p>
+        </p:txBody>
+      </p:sp>
+      <p:sp>
+        <p:nvSpPr>
+          <p:cNvPr id="3" name="TextBox 2"/>
+          <p:cNvSpPr txBox="1"/>
+          <p:nvPr/>
+        </p:nvSpPr>
+        <p:spPr>
+          <a:xfrm>
+            <a:off x="822960" y="3611880"/>
+            <a:ext cx="10552176" cy="457200"/>
+          </a:xfrm>
+          <a:prstGeom prst="rect">
+            <a:avLst/>
+          </a:prstGeom>
+          <a:noFill/>
+        </p:spPr>
+        <p:txBody>
+          <a:bodyPr wrap="square" anchor="ctr" lIns="27432" rIns="27432" tIns="9144" bIns="9144">
+            <a:spAutoFit/>
+          </a:bodyPr>
+          <a:lstStyle/>
+          <a:p>
+            <a:pPr algn="ctr">
+              <a:spcBef>
+                <a:spcPts val="0"/>
+              </a:spcBef>
+              <a:spcAft>
+                <a:spcPts val="200"/>
+              </a:spcAft>
+            </a:pPr>
+            <a:r>
+              <a:rPr sz="2200" b="1" i="0">
+                <a:solidFill>
+                  <a:srgbClr val="D95323"/>
+                </a:solidFill>
+                <a:latin typeface="Tahoma"/>
+              </a:rPr>
+              <a:t>บันทึกครั้งเดียว ทุกคนเห็น ทันที</a:t>
+            </a:r>
+          </a:p>
+        </p:txBody>
+      </p:sp>
+      <p:sp>
+        <p:nvSpPr>
+          <p:cNvPr id="4" name="TextBox 3"/>
+          <p:cNvSpPr txBox="1"/>
+          <p:nvPr/>
+        </p:nvSpPr>
+        <p:spPr>
+          <a:xfrm>
+            <a:off x="822960" y="4160520"/>
+            <a:ext cx="10552176" cy="457200"/>
+          </a:xfrm>
+          <a:prstGeom prst="rect">
+            <a:avLst/>
+          </a:prstGeom>
+          <a:noFill/>
+        </p:spPr>
+        <p:txBody>
+          <a:bodyPr wrap="square" anchor="ctr" lIns="27432" rIns="27432" tIns="9144" bIns="9144">
+            <a:spAutoFit/>
+          </a:bodyPr>
+          <a:lstStyle/>
+          <a:p>
+            <a:pPr algn="ctr">
+              <a:spcBef>
+                <a:spcPts val="0"/>
+              </a:spcBef>
+              <a:spcAft>
+                <a:spcPts val="200"/>
+              </a:spcAft>
+            </a:pPr>
+            <a:r>
+              <a:rPr sz="2200" b="1" i="0">
+                <a:solidFill>
+                  <a:srgbClr val="068734"/>
+                </a:solidFill>
+                <a:latin typeface="Tahoma"/>
+              </a:rPr>
+              <a:t>ขอบคุณ  ·  ถาม-ตอบ</a:t>
+            </a:r>
+          </a:p>
+        </p:txBody>
+      </p:sp>
+      <p:pic>
+        <p:nvPicPr>
+          <p:cNvPr id="5" name="Picture 4" descr="logo_r01.png"/>
+          <p:cNvPicPr>
+            <a:picLocks noChangeAspect="1"/>
+          </p:cNvPicPr>
+          <p:nvPr/>
+        </p:nvPicPr>
+        <p:blipFill>
+          <a:blip r:embed="rId2"/>
+          <a:stretch>
+            <a:fillRect/>
+          </a:stretch>
+        </p:blipFill>
+        <p:spPr>
+          <a:xfrm>
+            <a:off x="249631" y="6448348"/>
+            <a:ext cx="237744" cy="237744"/>
+          </a:xfrm>
+          <a:prstGeom prst="rect">
+            <a:avLst/>
+          </a:prstGeom>
+        </p:spPr>
+      </p:pic>
+      <p:sp>
+        <p:nvSpPr>
+          <p:cNvPr id="6" name="TextBox 5"/>
+          <p:cNvSpPr txBox="1"/>
+          <p:nvPr/>
+        </p:nvSpPr>
+        <p:spPr>
+          <a:xfrm>
+            <a:off x="566928" y="6353251"/>
+            <a:ext cx="3246120" cy="400507"/>
+          </a:xfrm>
+          <a:prstGeom prst="rect">
+            <a:avLst/>
+          </a:prstGeom>
+          <a:noFill/>
+        </p:spPr>
+        <p:txBody>
+          <a:bodyPr wrap="square" anchor="ctr" lIns="27432" rIns="27432" tIns="9144" bIns="9144">
+            <a:spAutoFit/>
+          </a:bodyPr>
+          <a:lstStyle/>
+          <a:p>
+            <a:pPr algn="l">
+              <a:spcBef>
+                <a:spcPts val="0"/>
+              </a:spcBef>
+              <a:spcAft>
+                <a:spcPts val="200"/>
+              </a:spcAft>
+            </a:pPr>
+            <a:r>
+              <a:rPr sz="2000" b="1" i="0">
+                <a:solidFill>
+                  <a:srgbClr val="068734"/>
+                </a:solidFill>
+                <a:latin typeface="Tahoma"/>
+              </a:rPr>
+              <a:t>THAI SUMMIT GROUP</a:t>
+            </a:r>
+          </a:p>
+        </p:txBody>
+      </p:sp>
+      <p:sp>
+        <p:nvSpPr>
+          <p:cNvPr id="7" name="TextBox 6"/>
+          <p:cNvSpPr txBox="1"/>
+          <p:nvPr/>
+        </p:nvSpPr>
+        <p:spPr>
+          <a:xfrm>
+            <a:off x="9400032" y="6510528"/>
+            <a:ext cx="2514600" cy="292608"/>
+          </a:xfrm>
+          <a:prstGeom prst="rect">
+            <a:avLst/>
+          </a:prstGeom>
+          <a:noFill/>
+        </p:spPr>
+        <p:txBody>
+          <a:bodyPr wrap="square" anchor="t" lIns="27432" rIns="27432" tIns="9144" bIns="9144">
+            <a:spAutoFit/>
+          </a:bodyPr>
+          <a:lstStyle/>
+          <a:p>
+            <a:pPr algn="r">
+              <a:spcBef>
+                <a:spcPts val="0"/>
+              </a:spcBef>
+              <a:spcAft>
+                <a:spcPts val="200"/>
+              </a:spcAft>
+            </a:pPr>
+            <a:r>
+              <a:rPr sz="1200" b="0" i="0">
+                <a:solidFill>
+                  <a:srgbClr val="068734"/>
+                </a:solidFill>
+                <a:latin typeface="Tahoma"/>
+              </a:rPr>
+              <a:t>24</a:t>
             </a:r>
           </a:p>
         </p:txBody>
